--- a/5_最终交付包/When_Every_Story_Sounds_The_Same v3.0.pptx
+++ b/5_最终交付包/When_Every_Story_Sounds_The_Same v3.0.pptx
@@ -3605,7 +3605,7 @@
                 <a:ea typeface="Calibri" pitchFamily="34" charset="-122"/>
                 <a:cs typeface="Calibri" pitchFamily="34" charset="-120"/>
               </a:rPr>
-              <a:t>[INSERT TEAM MEMBER NAMES]</a:t>
+              <a:t>Ruohan Wang · Ruiyang Zheng · Hongxin Luo · Yiou Liu · Jingzhi Hu</a:t>
             </a:r>
             <a:endParaRPr lang="en-US" sz="1700" dirty="0"/>
           </a:p>
